--- a/output_pptx/Be_Thou_My_Vision.pptx
+++ b/output_pptx/Be_Thou_My_Vision.pptx
@@ -3114,8 +3114,8 @@
         </p:nvSpPr>
         <p:spPr>
           <a:xfrm>
-            <a:off x="594360" y="2258568"/>
-            <a:ext cx="11002975" cy="685800"/>
+            <a:off x="640080" y="2052828"/>
+            <a:ext cx="10911535" cy="731520"/>
           </a:xfrm>
           <a:prstGeom prst="rect">
             <a:avLst/>
@@ -3130,7 +3130,7 @@
           <a:p>
             <a:pPr algn="ctr"/>
             <a:r>
-              <a:rPr sz="4400" b="1" i="0">
+              <a:rPr sz="4800" b="1" i="0">
                 <a:solidFill>
                   <a:srgbClr val="FFFFFF"/>
                 </a:solidFill>
@@ -3149,8 +3149,8 @@
         </p:nvSpPr>
         <p:spPr>
           <a:xfrm>
-            <a:off x="594360" y="2980944"/>
-            <a:ext cx="11002975" cy="347472"/>
+            <a:off x="640080" y="2985516"/>
+            <a:ext cx="10911535" cy="731520"/>
           </a:xfrm>
           <a:prstGeom prst="rect">
             <a:avLst/>
@@ -3165,83 +3165,13 @@
           <a:p>
             <a:pPr algn="ctr"/>
             <a:r>
-              <a:rPr sz="2200" b="0" i="1">
-                <a:solidFill>
-                  <a:srgbClr val="8C8C8C"/>
-                </a:solidFill>
-                <a:latin typeface="Arial"/>
-              </a:rPr>
-              <a:t/>
-            </a:r>
-          </a:p>
-        </p:txBody>
-      </p:sp>
-      <p:sp>
-        <p:nvSpPr>
-          <p:cNvPr id="4" name="TextBox 3"/>
-          <p:cNvSpPr txBox="1"/>
-          <p:nvPr/>
-        </p:nvSpPr>
-        <p:spPr>
-          <a:xfrm>
-            <a:off x="594360" y="3529584"/>
-            <a:ext cx="11002975" cy="685800"/>
-          </a:xfrm>
-          <a:prstGeom prst="rect">
-            <a:avLst/>
-          </a:prstGeom>
-          <a:noFill/>
-        </p:spPr>
-        <p:txBody>
-          <a:bodyPr wrap="square">
-            <a:spAutoFit/>
-          </a:bodyPr>
-          <a:lstStyle/>
-          <a:p>
-            <a:pPr algn="ctr"/>
-            <a:r>
-              <a:rPr sz="3520" b="1" i="0">
+              <a:rPr sz="3800" b="1" i="0">
                 <a:solidFill>
                   <a:srgbClr val="FFFFFF"/>
                 </a:solidFill>
                 <a:latin typeface="Arial"/>
               </a:rPr>
               <a:t>Sê Tu minha visão, Senhor do meu coração</a:t>
-            </a:r>
-          </a:p>
-        </p:txBody>
-      </p:sp>
-      <p:sp>
-        <p:nvSpPr>
-          <p:cNvPr id="5" name="TextBox 4"/>
-          <p:cNvSpPr txBox="1"/>
-          <p:nvPr/>
-        </p:nvSpPr>
-        <p:spPr>
-          <a:xfrm>
-            <a:off x="594360" y="4251960"/>
-            <a:ext cx="11002975" cy="347472"/>
-          </a:xfrm>
-          <a:prstGeom prst="rect">
-            <a:avLst/>
-          </a:prstGeom>
-          <a:noFill/>
-        </p:spPr>
-        <p:txBody>
-          <a:bodyPr wrap="square">
-            <a:spAutoFit/>
-          </a:bodyPr>
-          <a:lstStyle/>
-          <a:p>
-            <a:pPr algn="ctr"/>
-            <a:r>
-              <a:rPr sz="2200" b="0" i="1">
-                <a:solidFill>
-                  <a:srgbClr val="8C8C8C"/>
-                </a:solidFill>
-                <a:latin typeface="Arial"/>
-              </a:rPr>
-              <a:t/>
             </a:r>
           </a:p>
         </p:txBody>
@@ -3280,8 +3210,8 @@
         </p:nvSpPr>
         <p:spPr>
           <a:xfrm>
-            <a:off x="594360" y="1837944"/>
-            <a:ext cx="11002975" cy="685800"/>
+            <a:off x="640080" y="1650492"/>
+            <a:ext cx="10911535" cy="731520"/>
           </a:xfrm>
           <a:prstGeom prst="rect">
             <a:avLst/>
@@ -3296,7 +3226,7 @@
           <a:p>
             <a:pPr algn="ctr"/>
             <a:r>
-              <a:rPr sz="4400" b="1" i="0">
+              <a:rPr sz="4800" b="1" i="0">
                 <a:solidFill>
                   <a:srgbClr val="FFFFFF"/>
                 </a:solidFill>
@@ -3315,8 +3245,8 @@
         </p:nvSpPr>
         <p:spPr>
           <a:xfrm>
-            <a:off x="594360" y="2560320"/>
-            <a:ext cx="11002975" cy="384048"/>
+            <a:off x="640080" y="2418588"/>
+            <a:ext cx="10911535" cy="365760"/>
           </a:xfrm>
           <a:prstGeom prst="rect">
             <a:avLst/>
@@ -3333,7 +3263,7 @@
             <a:r>
               <a:rPr sz="2400" b="0" i="1">
                 <a:solidFill>
-                  <a:srgbClr val="B4B4B4"/>
+                  <a:srgbClr val="AAAAAA"/>
                 </a:solidFill>
                 <a:latin typeface="Arial"/>
               </a:rPr>
@@ -3350,8 +3280,8 @@
         </p:nvSpPr>
         <p:spPr>
           <a:xfrm>
-            <a:off x="594360" y="2980944"/>
-            <a:ext cx="11002975" cy="347472"/>
+            <a:off x="640080" y="2985516"/>
+            <a:ext cx="10911535" cy="731520"/>
           </a:xfrm>
           <a:prstGeom prst="rect">
             <a:avLst/>
@@ -3366,13 +3296,13 @@
           <a:p>
             <a:pPr algn="ctr"/>
             <a:r>
-              <a:rPr sz="2000" b="0" i="1">
-                <a:solidFill>
-                  <a:srgbClr val="8C8C8C"/>
+              <a:rPr sz="4800" b="1" i="0">
+                <a:solidFill>
+                  <a:srgbClr val="FFFFFF"/>
                 </a:solidFill>
                 <a:latin typeface="Arial"/>
               </a:rPr>
-              <a:t/>
+              <a:t>いかなることありとも</a:t>
             </a:r>
           </a:p>
         </p:txBody>
@@ -3385,8 +3315,8 @@
         </p:nvSpPr>
         <p:spPr>
           <a:xfrm>
-            <a:off x="594360" y="3529584"/>
-            <a:ext cx="11002975" cy="685800"/>
+            <a:off x="640080" y="3753612"/>
+            <a:ext cx="10911535" cy="365760"/>
           </a:xfrm>
           <a:prstGeom prst="rect">
             <a:avLst/>
@@ -3401,13 +3331,13 @@
           <a:p>
             <a:pPr algn="ctr"/>
             <a:r>
-              <a:rPr sz="4400" b="1" i="0">
-                <a:solidFill>
-                  <a:srgbClr val="FFFFFF"/>
+              <a:rPr sz="2400" b="0" i="1">
+                <a:solidFill>
+                  <a:srgbClr val="AAAAAA"/>
                 </a:solidFill>
                 <a:latin typeface="Arial"/>
               </a:rPr>
-              <a:t>いかなることありとも</a:t>
+              <a:t>ikanaru koto ari to mo</a:t>
             </a:r>
           </a:p>
         </p:txBody>
@@ -3420,8 +3350,8 @@
         </p:nvSpPr>
         <p:spPr>
           <a:xfrm>
-            <a:off x="594360" y="4251960"/>
-            <a:ext cx="11002975" cy="384048"/>
+            <a:off x="640080" y="4530852"/>
+            <a:ext cx="10911535" cy="310896"/>
           </a:xfrm>
           <a:prstGeom prst="rect">
             <a:avLst/>
@@ -3436,13 +3366,13 @@
           <a:p>
             <a:pPr algn="ctr"/>
             <a:r>
-              <a:rPr sz="2400" b="0" i="1">
-                <a:solidFill>
-                  <a:srgbClr val="B4B4B4"/>
+              <a:rPr sz="2000" b="0" i="1">
+                <a:solidFill>
+                  <a:srgbClr val="828282"/>
                 </a:solidFill>
                 <a:latin typeface="Arial"/>
               </a:rPr>
-              <a:t>ikanaru koto ari to mo</a:t>
+              <a:t>Sê Tu Minha Visão</a:t>
             </a:r>
           </a:p>
         </p:txBody>
@@ -3455,8 +3385,8 @@
         </p:nvSpPr>
         <p:spPr>
           <a:xfrm>
-            <a:off x="594360" y="4672584"/>
-            <a:ext cx="11002975" cy="347472"/>
+            <a:off x="640080" y="4896612"/>
+            <a:ext cx="10911535" cy="310896"/>
           </a:xfrm>
           <a:prstGeom prst="rect">
             <a:avLst/>
@@ -3473,11 +3403,11 @@
             <a:r>
               <a:rPr sz="2000" b="0" i="1">
                 <a:solidFill>
-                  <a:srgbClr val="8C8C8C"/>
+                  <a:srgbClr val="828282"/>
                 </a:solidFill>
                 <a:latin typeface="Arial"/>
               </a:rPr>
-              <a:t/>
+              <a:t>Sê Tu minha visão, Senhor do meu coração</a:t>
             </a:r>
           </a:p>
         </p:txBody>
@@ -3516,8 +3446,8 @@
         </p:nvSpPr>
         <p:spPr>
           <a:xfrm>
-            <a:off x="594360" y="1837944"/>
-            <a:ext cx="11002975" cy="685800"/>
+            <a:off x="640080" y="1650492"/>
+            <a:ext cx="10911535" cy="731520"/>
           </a:xfrm>
           <a:prstGeom prst="rect">
             <a:avLst/>
@@ -3532,7 +3462,7 @@
           <a:p>
             <a:pPr algn="ctr"/>
             <a:r>
-              <a:rPr sz="4400" b="1" i="0">
+              <a:rPr sz="4800" b="1" i="0">
                 <a:solidFill>
                   <a:srgbClr val="FFFFFF"/>
                 </a:solidFill>
@@ -3551,8 +3481,8 @@
         </p:nvSpPr>
         <p:spPr>
           <a:xfrm>
-            <a:off x="594360" y="2560320"/>
-            <a:ext cx="11002975" cy="384048"/>
+            <a:off x="640080" y="2418588"/>
+            <a:ext cx="10911535" cy="365760"/>
           </a:xfrm>
           <a:prstGeom prst="rect">
             <a:avLst/>
@@ -3569,7 +3499,7 @@
             <a:r>
               <a:rPr sz="2400" b="0" i="1">
                 <a:solidFill>
-                  <a:srgbClr val="B4B4B4"/>
+                  <a:srgbClr val="AAAAAA"/>
                 </a:solidFill>
                 <a:latin typeface="Arial"/>
               </a:rPr>
@@ -3586,8 +3516,8 @@
         </p:nvSpPr>
         <p:spPr>
           <a:xfrm>
-            <a:off x="594360" y="2980944"/>
-            <a:ext cx="11002975" cy="347472"/>
+            <a:off x="640080" y="2985516"/>
+            <a:ext cx="10911535" cy="731520"/>
           </a:xfrm>
           <a:prstGeom prst="rect">
             <a:avLst/>
@@ -3602,13 +3532,13 @@
           <a:p>
             <a:pPr algn="ctr"/>
             <a:r>
-              <a:rPr sz="2000" b="0" i="1">
-                <a:solidFill>
-                  <a:srgbClr val="8C8C8C"/>
+              <a:rPr sz="4800" b="1" i="0">
+                <a:solidFill>
+                  <a:srgbClr val="FFFFFF"/>
                 </a:solidFill>
                 <a:latin typeface="Arial"/>
               </a:rPr>
-              <a:t/>
+              <a:t>いよよ高き空へと</a:t>
             </a:r>
           </a:p>
         </p:txBody>
@@ -3621,8 +3551,8 @@
         </p:nvSpPr>
         <p:spPr>
           <a:xfrm>
-            <a:off x="594360" y="3529584"/>
-            <a:ext cx="11002975" cy="685800"/>
+            <a:off x="640080" y="3753612"/>
+            <a:ext cx="10911535" cy="365760"/>
           </a:xfrm>
           <a:prstGeom prst="rect">
             <a:avLst/>
@@ -3637,13 +3567,13 @@
           <a:p>
             <a:pPr algn="ctr"/>
             <a:r>
-              <a:rPr sz="4400" b="1" i="0">
-                <a:solidFill>
-                  <a:srgbClr val="FFFFFF"/>
+              <a:rPr sz="2400" b="0" i="1">
+                <a:solidFill>
+                  <a:srgbClr val="AAAAAA"/>
                 </a:solidFill>
                 <a:latin typeface="Arial"/>
               </a:rPr>
-              <a:t>いよよ高き空へと</a:t>
+              <a:t>iyoyo takaki so-ra he to</a:t>
             </a:r>
           </a:p>
         </p:txBody>
@@ -3656,8 +3586,8 @@
         </p:nvSpPr>
         <p:spPr>
           <a:xfrm>
-            <a:off x="594360" y="4251960"/>
-            <a:ext cx="11002975" cy="384048"/>
+            <a:off x="640080" y="4530852"/>
+            <a:ext cx="10911535" cy="310896"/>
           </a:xfrm>
           <a:prstGeom prst="rect">
             <a:avLst/>
@@ -3672,13 +3602,13 @@
           <a:p>
             <a:pPr algn="ctr"/>
             <a:r>
-              <a:rPr sz="2400" b="0" i="1">
-                <a:solidFill>
-                  <a:srgbClr val="B4B4B4"/>
+              <a:rPr sz="2000" b="0" i="1">
+                <a:solidFill>
+                  <a:srgbClr val="828282"/>
                 </a:solidFill>
                 <a:latin typeface="Arial"/>
               </a:rPr>
-              <a:t>iyoyo takaki so-ra he to</a:t>
+              <a:t>Nada além de Ti seja tudo para mim</a:t>
             </a:r>
           </a:p>
         </p:txBody>
@@ -3691,8 +3621,8 @@
         </p:nvSpPr>
         <p:spPr>
           <a:xfrm>
-            <a:off x="594360" y="4672584"/>
-            <a:ext cx="11002975" cy="347472"/>
+            <a:off x="640080" y="4896612"/>
+            <a:ext cx="10911535" cy="310896"/>
           </a:xfrm>
           <a:prstGeom prst="rect">
             <a:avLst/>
@@ -3709,11 +3639,11 @@
             <a:r>
               <a:rPr sz="2000" b="0" i="1">
                 <a:solidFill>
-                  <a:srgbClr val="8C8C8C"/>
+                  <a:srgbClr val="828282"/>
                 </a:solidFill>
                 <a:latin typeface="Arial"/>
               </a:rPr>
-              <a:t/>
+              <a:t>Tu meu melhor pensamento de dia ou de noite</a:t>
             </a:r>
           </a:p>
         </p:txBody>
@@ -3752,8 +3682,8 @@
         </p:nvSpPr>
         <p:spPr>
           <a:xfrm>
-            <a:off x="594360" y="2258568"/>
-            <a:ext cx="11002975" cy="685800"/>
+            <a:off x="640080" y="2052828"/>
+            <a:ext cx="10911535" cy="731520"/>
           </a:xfrm>
           <a:prstGeom prst="rect">
             <a:avLst/>
@@ -3768,7 +3698,7 @@
           <a:p>
             <a:pPr algn="ctr"/>
             <a:r>
-              <a:rPr sz="4141" b="1" i="0">
+              <a:rPr sz="4500" b="1" i="0">
                 <a:solidFill>
                   <a:srgbClr val="FFFFFF"/>
                 </a:solidFill>
@@ -3787,8 +3717,8 @@
         </p:nvSpPr>
         <p:spPr>
           <a:xfrm>
-            <a:off x="594360" y="2980944"/>
-            <a:ext cx="11002975" cy="347472"/>
+            <a:off x="640080" y="2985516"/>
+            <a:ext cx="10911535" cy="731520"/>
           </a:xfrm>
           <a:prstGeom prst="rect">
             <a:avLst/>
@@ -3803,83 +3733,13 @@
           <a:p>
             <a:pPr algn="ctr"/>
             <a:r>
-              <a:rPr sz="2200" b="0" i="1">
-                <a:solidFill>
-                  <a:srgbClr val="8C8C8C"/>
-                </a:solidFill>
-                <a:latin typeface="Arial"/>
-              </a:rPr>
-              <a:t/>
-            </a:r>
-          </a:p>
-        </p:txBody>
-      </p:sp>
-      <p:sp>
-        <p:nvSpPr>
-          <p:cNvPr id="4" name="TextBox 3"/>
-          <p:cNvSpPr txBox="1"/>
-          <p:nvPr/>
-        </p:nvSpPr>
-        <p:spPr>
-          <a:xfrm>
-            <a:off x="594360" y="3529584"/>
-            <a:ext cx="11002975" cy="685800"/>
-          </a:xfrm>
-          <a:prstGeom prst="rect">
-            <a:avLst/>
-          </a:prstGeom>
-          <a:noFill/>
-        </p:spPr>
-        <p:txBody>
-          <a:bodyPr wrap="square">
-            <a:spAutoFit/>
-          </a:bodyPr>
-          <a:lstStyle/>
-          <a:p>
-            <a:pPr algn="ctr"/>
-            <a:r>
-              <a:rPr sz="3274" b="1" i="0">
+              <a:rPr sz="3500" b="1" i="0">
                 <a:solidFill>
                   <a:srgbClr val="FFFFFF"/>
                 </a:solidFill>
                 <a:latin typeface="Arial"/>
               </a:rPr>
               <a:t>Tu meu melhor pensamento de dia ou de noite</a:t>
-            </a:r>
-          </a:p>
-        </p:txBody>
-      </p:sp>
-      <p:sp>
-        <p:nvSpPr>
-          <p:cNvPr id="5" name="TextBox 4"/>
-          <p:cNvSpPr txBox="1"/>
-          <p:nvPr/>
-        </p:nvSpPr>
-        <p:spPr>
-          <a:xfrm>
-            <a:off x="594360" y="4251960"/>
-            <a:ext cx="11002975" cy="347472"/>
-          </a:xfrm>
-          <a:prstGeom prst="rect">
-            <a:avLst/>
-          </a:prstGeom>
-          <a:noFill/>
-        </p:spPr>
-        <p:txBody>
-          <a:bodyPr wrap="square">
-            <a:spAutoFit/>
-          </a:bodyPr>
-          <a:lstStyle/>
-          <a:p>
-            <a:pPr algn="ctr"/>
-            <a:r>
-              <a:rPr sz="2200" b="0" i="1">
-                <a:solidFill>
-                  <a:srgbClr val="8C8C8C"/>
-                </a:solidFill>
-                <a:latin typeface="Arial"/>
-              </a:rPr>
-              <a:t/>
             </a:r>
           </a:p>
         </p:txBody>
@@ -3918,8 +3778,8 @@
         </p:nvSpPr>
         <p:spPr>
           <a:xfrm>
-            <a:off x="594360" y="1837944"/>
-            <a:ext cx="11002975" cy="685800"/>
+            <a:off x="640080" y="1650492"/>
+            <a:ext cx="10911535" cy="731520"/>
           </a:xfrm>
           <a:prstGeom prst="rect">
             <a:avLst/>
@@ -3934,7 +3794,7 @@
           <a:p>
             <a:pPr algn="ctr"/>
             <a:r>
-              <a:rPr sz="4400" b="1" i="0">
+              <a:rPr sz="4800" b="1" i="0">
                 <a:solidFill>
                   <a:srgbClr val="FFFFFF"/>
                 </a:solidFill>
@@ -3953,8 +3813,8 @@
         </p:nvSpPr>
         <p:spPr>
           <a:xfrm>
-            <a:off x="594360" y="2560320"/>
-            <a:ext cx="11002975" cy="384048"/>
+            <a:off x="640080" y="2418588"/>
+            <a:ext cx="10911535" cy="365760"/>
           </a:xfrm>
           <a:prstGeom prst="rect">
             <a:avLst/>
@@ -3971,7 +3831,7 @@
             <a:r>
               <a:rPr sz="2400" b="0" i="1">
                 <a:solidFill>
-                  <a:srgbClr val="B4B4B4"/>
+                  <a:srgbClr val="AAAAAA"/>
                 </a:solidFill>
                 <a:latin typeface="Arial"/>
               </a:rPr>
@@ -3988,8 +3848,8 @@
         </p:nvSpPr>
         <p:spPr>
           <a:xfrm>
-            <a:off x="594360" y="2980944"/>
-            <a:ext cx="11002975" cy="347472"/>
+            <a:off x="640080" y="2985516"/>
+            <a:ext cx="10911535" cy="731520"/>
           </a:xfrm>
           <a:prstGeom prst="rect">
             <a:avLst/>
@@ -4004,13 +3864,13 @@
           <a:p>
             <a:pPr algn="ctr"/>
             <a:r>
-              <a:rPr sz="2000" b="0" i="1">
-                <a:solidFill>
-                  <a:srgbClr val="8C8C8C"/>
+              <a:rPr sz="4800" b="1" i="0">
+                <a:solidFill>
+                  <a:srgbClr val="FFFFFF"/>
                 </a:solidFill>
                 <a:latin typeface="Arial"/>
               </a:rPr>
-              <a:t/>
+              <a:t>われとともに ますとは</a:t>
             </a:r>
           </a:p>
         </p:txBody>
@@ -4023,8 +3883,8 @@
         </p:nvSpPr>
         <p:spPr>
           <a:xfrm>
-            <a:off x="594360" y="3529584"/>
-            <a:ext cx="11002975" cy="685800"/>
+            <a:off x="640080" y="3753612"/>
+            <a:ext cx="10911535" cy="365760"/>
           </a:xfrm>
           <a:prstGeom prst="rect">
             <a:avLst/>
@@ -4039,13 +3899,13 @@
           <a:p>
             <a:pPr algn="ctr"/>
             <a:r>
-              <a:rPr sz="4400" b="1" i="0">
-                <a:solidFill>
-                  <a:srgbClr val="FFFFFF"/>
+              <a:rPr sz="2400" b="0" i="1">
+                <a:solidFill>
+                  <a:srgbClr val="AAAAAA"/>
                 </a:solidFill>
                 <a:latin typeface="Arial"/>
               </a:rPr>
-              <a:t>われとともに ますとは</a:t>
+              <a:t>ware to tomo ni masu towa</a:t>
             </a:r>
           </a:p>
         </p:txBody>
@@ -4058,8 +3918,8 @@
         </p:nvSpPr>
         <p:spPr>
           <a:xfrm>
-            <a:off x="594360" y="4251960"/>
-            <a:ext cx="11002975" cy="384048"/>
+            <a:off x="640080" y="4530852"/>
+            <a:ext cx="10911535" cy="310896"/>
           </a:xfrm>
           <a:prstGeom prst="rect">
             <a:avLst/>
@@ -4074,13 +3934,13 @@
           <a:p>
             <a:pPr algn="ctr"/>
             <a:r>
-              <a:rPr sz="2400" b="0" i="1">
-                <a:solidFill>
-                  <a:srgbClr val="B4B4B4"/>
+              <a:rPr sz="2000" b="0" i="1">
+                <a:solidFill>
+                  <a:srgbClr val="828282"/>
                 </a:solidFill>
                 <a:latin typeface="Arial"/>
               </a:rPr>
-              <a:t>ware to tomo ni masu towa</a:t>
+              <a:t>Sê Tu Minha Visão</a:t>
             </a:r>
           </a:p>
         </p:txBody>
@@ -4093,8 +3953,8 @@
         </p:nvSpPr>
         <p:spPr>
           <a:xfrm>
-            <a:off x="594360" y="4672584"/>
-            <a:ext cx="11002975" cy="347472"/>
+            <a:off x="640080" y="4896612"/>
+            <a:ext cx="10911535" cy="310896"/>
           </a:xfrm>
           <a:prstGeom prst="rect">
             <a:avLst/>
@@ -4111,11 +3971,11 @@
             <a:r>
               <a:rPr sz="2000" b="0" i="1">
                 <a:solidFill>
-                  <a:srgbClr val="8C8C8C"/>
+                  <a:srgbClr val="828282"/>
                 </a:solidFill>
                 <a:latin typeface="Arial"/>
               </a:rPr>
-              <a:t/>
+              <a:t>Sê Tu minha visão, Senhor do meu coração</a:t>
             </a:r>
           </a:p>
         </p:txBody>
@@ -4154,8 +4014,8 @@
         </p:nvSpPr>
         <p:spPr>
           <a:xfrm>
-            <a:off x="594360" y="1837944"/>
-            <a:ext cx="11002975" cy="685800"/>
+            <a:off x="640080" y="1650492"/>
+            <a:ext cx="10911535" cy="731520"/>
           </a:xfrm>
           <a:prstGeom prst="rect">
             <a:avLst/>
@@ -4170,7 +4030,7 @@
           <a:p>
             <a:pPr algn="ctr"/>
             <a:r>
-              <a:rPr sz="4400" b="1" i="0">
+              <a:rPr sz="4800" b="1" i="0">
                 <a:solidFill>
                   <a:srgbClr val="FFFFFF"/>
                 </a:solidFill>
@@ -4189,8 +4049,8 @@
         </p:nvSpPr>
         <p:spPr>
           <a:xfrm>
-            <a:off x="594360" y="2560320"/>
-            <a:ext cx="11002975" cy="384048"/>
+            <a:off x="640080" y="2418588"/>
+            <a:ext cx="10911535" cy="365760"/>
           </a:xfrm>
           <a:prstGeom prst="rect">
             <a:avLst/>
@@ -4207,7 +4067,7 @@
             <a:r>
               <a:rPr sz="2400" b="0" i="1">
                 <a:solidFill>
-                  <a:srgbClr val="B4B4B4"/>
+                  <a:srgbClr val="AAAAAA"/>
                 </a:solidFill>
                 <a:latin typeface="Arial"/>
               </a:rPr>
@@ -4224,8 +4084,8 @@
         </p:nvSpPr>
         <p:spPr>
           <a:xfrm>
-            <a:off x="594360" y="2980944"/>
-            <a:ext cx="11002975" cy="347472"/>
+            <a:off x="640080" y="2985516"/>
+            <a:ext cx="10911535" cy="731520"/>
           </a:xfrm>
           <a:prstGeom prst="rect">
             <a:avLst/>
@@ -4240,13 +4100,13 @@
           <a:p>
             <a:pPr algn="ctr"/>
             <a:r>
-              <a:rPr sz="2000" b="0" i="1">
-                <a:solidFill>
-                  <a:srgbClr val="8C8C8C"/>
+              <a:rPr sz="4800" b="1" i="0">
+                <a:solidFill>
+                  <a:srgbClr val="FFFFFF"/>
                 </a:solidFill>
                 <a:latin typeface="Arial"/>
               </a:rPr>
-              <a:t/>
+              <a:t>およばざるつなぎなり</a:t>
             </a:r>
           </a:p>
         </p:txBody>
@@ -4259,8 +4119,8 @@
         </p:nvSpPr>
         <p:spPr>
           <a:xfrm>
-            <a:off x="594360" y="3529584"/>
-            <a:ext cx="11002975" cy="685800"/>
+            <a:off x="640080" y="3753612"/>
+            <a:ext cx="10911535" cy="365760"/>
           </a:xfrm>
           <a:prstGeom prst="rect">
             <a:avLst/>
@@ -4275,13 +4135,13 @@
           <a:p>
             <a:pPr algn="ctr"/>
             <a:r>
-              <a:rPr sz="4400" b="1" i="0">
-                <a:solidFill>
-                  <a:srgbClr val="FFFFFF"/>
+              <a:rPr sz="2400" b="0" i="1">
+                <a:solidFill>
+                  <a:srgbClr val="AAAAAA"/>
                 </a:solidFill>
                 <a:latin typeface="Arial"/>
               </a:rPr>
-              <a:t>およばざるつなぎなり</a:t>
+              <a:t>oyobazaru tsunagi nari</a:t>
             </a:r>
           </a:p>
         </p:txBody>
@@ -4294,8 +4154,8 @@
         </p:nvSpPr>
         <p:spPr>
           <a:xfrm>
-            <a:off x="594360" y="4251960"/>
-            <a:ext cx="11002975" cy="384048"/>
+            <a:off x="640080" y="4530852"/>
+            <a:ext cx="10911535" cy="310896"/>
           </a:xfrm>
           <a:prstGeom prst="rect">
             <a:avLst/>
@@ -4310,13 +4170,13 @@
           <a:p>
             <a:pPr algn="ctr"/>
             <a:r>
-              <a:rPr sz="2400" b="0" i="1">
-                <a:solidFill>
-                  <a:srgbClr val="B4B4B4"/>
+              <a:rPr sz="2000" b="0" i="1">
+                <a:solidFill>
+                  <a:srgbClr val="828282"/>
                 </a:solidFill>
                 <a:latin typeface="Arial"/>
               </a:rPr>
-              <a:t>oyobazaru tsunagi nari</a:t>
+              <a:t>Nada além de Ti seja tudo para mim</a:t>
             </a:r>
           </a:p>
         </p:txBody>
@@ -4329,8 +4189,8 @@
         </p:nvSpPr>
         <p:spPr>
           <a:xfrm>
-            <a:off x="594360" y="4672584"/>
-            <a:ext cx="11002975" cy="347472"/>
+            <a:off x="640080" y="4896612"/>
+            <a:ext cx="10911535" cy="310896"/>
           </a:xfrm>
           <a:prstGeom prst="rect">
             <a:avLst/>
@@ -4347,11 +4207,11 @@
             <a:r>
               <a:rPr sz="2000" b="0" i="1">
                 <a:solidFill>
-                  <a:srgbClr val="8C8C8C"/>
+                  <a:srgbClr val="828282"/>
                 </a:solidFill>
                 <a:latin typeface="Arial"/>
               </a:rPr>
-              <a:t/>
+              <a:t>Tu meu melhor pensamento de dia ou de noite</a:t>
             </a:r>
           </a:p>
         </p:txBody>
@@ -4390,8 +4250,8 @@
         </p:nvSpPr>
         <p:spPr>
           <a:xfrm>
-            <a:off x="594360" y="2258568"/>
-            <a:ext cx="11002975" cy="685800"/>
+            <a:off x="640080" y="2052828"/>
+            <a:ext cx="10911535" cy="731520"/>
           </a:xfrm>
           <a:prstGeom prst="rect">
             <a:avLst/>
@@ -4406,7 +4266,7 @@
           <a:p>
             <a:pPr algn="ctr"/>
             <a:r>
-              <a:rPr sz="3200" b="1" i="0">
+              <a:rPr sz="3400" b="1" i="0">
                 <a:solidFill>
                   <a:srgbClr val="FFFFFF"/>
                 </a:solidFill>
@@ -4425,8 +4285,8 @@
         </p:nvSpPr>
         <p:spPr>
           <a:xfrm>
-            <a:off x="594360" y="2980944"/>
-            <a:ext cx="11002975" cy="347472"/>
+            <a:off x="640080" y="2985516"/>
+            <a:ext cx="10911535" cy="731520"/>
           </a:xfrm>
           <a:prstGeom prst="rect">
             <a:avLst/>
@@ -4441,83 +4301,13 @@
           <a:p>
             <a:pPr algn="ctr"/>
             <a:r>
-              <a:rPr sz="2200" b="0" i="1">
-                <a:solidFill>
-                  <a:srgbClr val="8C8C8C"/>
-                </a:solidFill>
-                <a:latin typeface="Arial"/>
-              </a:rPr>
-              <a:t/>
-            </a:r>
-          </a:p>
-        </p:txBody>
-      </p:sp>
-      <p:sp>
-        <p:nvSpPr>
-          <p:cNvPr id="4" name="TextBox 3"/>
-          <p:cNvSpPr txBox="1"/>
-          <p:nvPr/>
-        </p:nvSpPr>
-        <p:spPr>
-          <a:xfrm>
-            <a:off x="594360" y="3529584"/>
-            <a:ext cx="11002975" cy="685800"/>
-          </a:xfrm>
-          <a:prstGeom prst="rect">
-            <a:avLst/>
-          </a:prstGeom>
-          <a:noFill/>
-        </p:spPr>
-        <p:txBody>
-          <a:bodyPr wrap="square">
-            <a:spAutoFit/>
-          </a:bodyPr>
-          <a:lstStyle/>
-          <a:p>
-            <a:pPr algn="ctr"/>
-            <a:r>
-              <a:rPr sz="3520" b="1" i="0">
+              <a:rPr sz="3800" b="1" i="0">
                 <a:solidFill>
                   <a:srgbClr val="FFFFFF"/>
                 </a:solidFill>
                 <a:latin typeface="Arial"/>
               </a:rPr>
               <a:t>Sê Tu minha sabedoria e Tu minha palavra</a:t>
-            </a:r>
-          </a:p>
-        </p:txBody>
-      </p:sp>
-      <p:sp>
-        <p:nvSpPr>
-          <p:cNvPr id="5" name="TextBox 4"/>
-          <p:cNvSpPr txBox="1"/>
-          <p:nvPr/>
-        </p:nvSpPr>
-        <p:spPr>
-          <a:xfrm>
-            <a:off x="594360" y="4251960"/>
-            <a:ext cx="11002975" cy="347472"/>
-          </a:xfrm>
-          <a:prstGeom prst="rect">
-            <a:avLst/>
-          </a:prstGeom>
-          <a:noFill/>
-        </p:spPr>
-        <p:txBody>
-          <a:bodyPr wrap="square">
-            <a:spAutoFit/>
-          </a:bodyPr>
-          <a:lstStyle/>
-          <a:p>
-            <a:pPr algn="ctr"/>
-            <a:r>
-              <a:rPr sz="2200" b="0" i="1">
-                <a:solidFill>
-                  <a:srgbClr val="8C8C8C"/>
-                </a:solidFill>
-                <a:latin typeface="Arial"/>
-              </a:rPr>
-              <a:t/>
             </a:r>
           </a:p>
         </p:txBody>
@@ -4556,8 +4346,8 @@
         </p:nvSpPr>
         <p:spPr>
           <a:xfrm>
-            <a:off x="594360" y="2258568"/>
-            <a:ext cx="11002975" cy="685800"/>
+            <a:off x="640080" y="2052828"/>
+            <a:ext cx="10911535" cy="731520"/>
           </a:xfrm>
           <a:prstGeom prst="rect">
             <a:avLst/>
@@ -4572,7 +4362,7 @@
           <a:p>
             <a:pPr algn="ctr"/>
             <a:r>
-              <a:rPr sz="4266" b="1" i="0">
+              <a:rPr sz="4600" b="1" i="0">
                 <a:solidFill>
                   <a:srgbClr val="FFFFFF"/>
                 </a:solidFill>
@@ -4591,8 +4381,8 @@
         </p:nvSpPr>
         <p:spPr>
           <a:xfrm>
-            <a:off x="594360" y="2980944"/>
-            <a:ext cx="11002975" cy="347472"/>
+            <a:off x="640080" y="2985516"/>
+            <a:ext cx="10911535" cy="731520"/>
           </a:xfrm>
           <a:prstGeom prst="rect">
             <a:avLst/>
@@ -4607,83 +4397,13 @@
           <a:p>
             <a:pPr algn="ctr"/>
             <a:r>
-              <a:rPr sz="2200" b="0" i="1">
-                <a:solidFill>
-                  <a:srgbClr val="8C8C8C"/>
-                </a:solidFill>
-                <a:latin typeface="Arial"/>
-              </a:rPr>
-              <a:t/>
-            </a:r>
-          </a:p>
-        </p:txBody>
-      </p:sp>
-      <p:sp>
-        <p:nvSpPr>
-          <p:cNvPr id="4" name="TextBox 3"/>
-          <p:cNvSpPr txBox="1"/>
-          <p:nvPr/>
-        </p:nvSpPr>
-        <p:spPr>
-          <a:xfrm>
-            <a:off x="594360" y="3529584"/>
-            <a:ext cx="11002975" cy="685800"/>
-          </a:xfrm>
-          <a:prstGeom prst="rect">
-            <a:avLst/>
-          </a:prstGeom>
-          <a:noFill/>
-        </p:spPr>
-        <p:txBody>
-          <a:bodyPr wrap="square">
-            <a:spAutoFit/>
-          </a:bodyPr>
-          <a:lstStyle/>
-          <a:p>
-            <a:pPr algn="ctr"/>
-            <a:r>
-              <a:rPr sz="3352" b="1" i="0">
+              <a:rPr sz="3600" b="1" i="0">
                 <a:solidFill>
                   <a:srgbClr val="FFFFFF"/>
                 </a:solidFill>
                 <a:latin typeface="Arial"/>
               </a:rPr>
               <a:t>Tu meu grande Pai, eu Teu verdadeiro filho</a:t>
-            </a:r>
-          </a:p>
-        </p:txBody>
-      </p:sp>
-      <p:sp>
-        <p:nvSpPr>
-          <p:cNvPr id="5" name="TextBox 4"/>
-          <p:cNvSpPr txBox="1"/>
-          <p:nvPr/>
-        </p:nvSpPr>
-        <p:spPr>
-          <a:xfrm>
-            <a:off x="594360" y="4251960"/>
-            <a:ext cx="11002975" cy="347472"/>
-          </a:xfrm>
-          <a:prstGeom prst="rect">
-            <a:avLst/>
-          </a:prstGeom>
-          <a:noFill/>
-        </p:spPr>
-        <p:txBody>
-          <a:bodyPr wrap="square">
-            <a:spAutoFit/>
-          </a:bodyPr>
-          <a:lstStyle/>
-          <a:p>
-            <a:pPr algn="ctr"/>
-            <a:r>
-              <a:rPr sz="2200" b="0" i="1">
-                <a:solidFill>
-                  <a:srgbClr val="8C8C8C"/>
-                </a:solidFill>
-                <a:latin typeface="Arial"/>
-              </a:rPr>
-              <a:t/>
             </a:r>
           </a:p>
         </p:txBody>
@@ -4722,8 +4442,8 @@
         </p:nvSpPr>
         <p:spPr>
           <a:xfrm>
-            <a:off x="594360" y="2894076"/>
-            <a:ext cx="11002975" cy="685800"/>
+            <a:off x="640080" y="2702052"/>
+            <a:ext cx="10911535" cy="731520"/>
           </a:xfrm>
           <a:prstGeom prst="rect">
             <a:avLst/>
@@ -4738,48 +4458,13 @@
           <a:p>
             <a:pPr algn="ctr"/>
             <a:r>
-              <a:rPr sz="4022" b="1" i="0">
+              <a:rPr sz="4300" b="1" i="0">
                 <a:solidFill>
                   <a:srgbClr val="FFFFFF"/>
                 </a:solidFill>
                 <a:latin typeface="Arial"/>
               </a:rPr>
               <a:t>Tu em mim habitando e eu contigo um</a:t>
-            </a:r>
-          </a:p>
-        </p:txBody>
-      </p:sp>
-      <p:sp>
-        <p:nvSpPr>
-          <p:cNvPr id="3" name="TextBox 2"/>
-          <p:cNvSpPr txBox="1"/>
-          <p:nvPr/>
-        </p:nvSpPr>
-        <p:spPr>
-          <a:xfrm>
-            <a:off x="594360" y="3616452"/>
-            <a:ext cx="11002975" cy="347472"/>
-          </a:xfrm>
-          <a:prstGeom prst="rect">
-            <a:avLst/>
-          </a:prstGeom>
-          <a:noFill/>
-        </p:spPr>
-        <p:txBody>
-          <a:bodyPr wrap="square">
-            <a:spAutoFit/>
-          </a:bodyPr>
-          <a:lstStyle/>
-          <a:p>
-            <a:pPr algn="ctr"/>
-            <a:r>
-              <a:rPr sz="2200" b="0" i="1">
-                <a:solidFill>
-                  <a:srgbClr val="8C8C8C"/>
-                </a:solidFill>
-                <a:latin typeface="Arial"/>
-              </a:rPr>
-              <a:t/>
             </a:r>
           </a:p>
         </p:txBody>
@@ -4818,8 +4503,8 @@
         </p:nvSpPr>
         <p:spPr>
           <a:xfrm>
-            <a:off x="594360" y="2258568"/>
-            <a:ext cx="11002975" cy="685800"/>
+            <a:off x="640080" y="2052828"/>
+            <a:ext cx="10911535" cy="731520"/>
           </a:xfrm>
           <a:prstGeom prst="rect">
             <a:avLst/>
@@ -4834,7 +4519,7 @@
           <a:p>
             <a:pPr algn="ctr"/>
             <a:r>
-              <a:rPr sz="4400" b="1" i="0">
+              <a:rPr sz="4800" b="1" i="0">
                 <a:solidFill>
                   <a:srgbClr val="FFFFFF"/>
                 </a:solidFill>
@@ -4853,8 +4538,8 @@
         </p:nvSpPr>
         <p:spPr>
           <a:xfrm>
-            <a:off x="594360" y="2980944"/>
-            <a:ext cx="11002975" cy="347472"/>
+            <a:off x="640080" y="2985516"/>
+            <a:ext cx="10911535" cy="731520"/>
           </a:xfrm>
           <a:prstGeom prst="rect">
             <a:avLst/>
@@ -4869,83 +4554,13 @@
           <a:p>
             <a:pPr algn="ctr"/>
             <a:r>
-              <a:rPr sz="2200" b="0" i="1">
-                <a:solidFill>
-                  <a:srgbClr val="8C8C8C"/>
-                </a:solidFill>
-                <a:latin typeface="Arial"/>
-              </a:rPr>
-              <a:t/>
-            </a:r>
-          </a:p>
-        </p:txBody>
-      </p:sp>
-      <p:sp>
-        <p:nvSpPr>
-          <p:cNvPr id="4" name="TextBox 3"/>
-          <p:cNvSpPr txBox="1"/>
-          <p:nvPr/>
-        </p:nvSpPr>
-        <p:spPr>
-          <a:xfrm>
-            <a:off x="594360" y="3529584"/>
-            <a:ext cx="11002975" cy="685800"/>
-          </a:xfrm>
-          <a:prstGeom prst="rect">
-            <a:avLst/>
-          </a:prstGeom>
-          <a:noFill/>
-        </p:spPr>
-        <p:txBody>
-          <a:bodyPr wrap="square">
-            <a:spAutoFit/>
-          </a:bodyPr>
-          <a:lstStyle/>
-          <a:p>
-            <a:pPr algn="ctr"/>
-            <a:r>
-              <a:rPr sz="3610" b="1" i="0">
+              <a:rPr sz="3900" b="1" i="0">
                 <a:solidFill>
                   <a:srgbClr val="FFFFFF"/>
                 </a:solidFill>
                 <a:latin typeface="Arial"/>
               </a:rPr>
               <a:t>Tu e Tu somente primeiro em meu coração</a:t>
-            </a:r>
-          </a:p>
-        </p:txBody>
-      </p:sp>
-      <p:sp>
-        <p:nvSpPr>
-          <p:cNvPr id="5" name="TextBox 4"/>
-          <p:cNvSpPr txBox="1"/>
-          <p:nvPr/>
-        </p:nvSpPr>
-        <p:spPr>
-          <a:xfrm>
-            <a:off x="594360" y="4251960"/>
-            <a:ext cx="11002975" cy="347472"/>
-          </a:xfrm>
-          <a:prstGeom prst="rect">
-            <a:avLst/>
-          </a:prstGeom>
-          <a:noFill/>
-        </p:spPr>
-        <p:txBody>
-          <a:bodyPr wrap="square">
-            <a:spAutoFit/>
-          </a:bodyPr>
-          <a:lstStyle/>
-          <a:p>
-            <a:pPr algn="ctr"/>
-            <a:r>
-              <a:rPr sz="2200" b="0" i="1">
-                <a:solidFill>
-                  <a:srgbClr val="8C8C8C"/>
-                </a:solidFill>
-                <a:latin typeface="Arial"/>
-              </a:rPr>
-              <a:t/>
             </a:r>
           </a:p>
         </p:txBody>
@@ -4984,8 +4599,8 @@
         </p:nvSpPr>
         <p:spPr>
           <a:xfrm>
-            <a:off x="594360" y="2258568"/>
-            <a:ext cx="11002975" cy="685800"/>
+            <a:off x="640080" y="2052828"/>
+            <a:ext cx="10911535" cy="731520"/>
           </a:xfrm>
           <a:prstGeom prst="rect">
             <a:avLst/>
@@ -5000,7 +4615,7 @@
           <a:p>
             <a:pPr algn="ctr"/>
             <a:r>
-              <a:rPr sz="4022" b="1" i="0">
+              <a:rPr sz="4300" b="1" i="0">
                 <a:solidFill>
                   <a:srgbClr val="FFFFFF"/>
                 </a:solidFill>
@@ -5019,8 +4634,8 @@
         </p:nvSpPr>
         <p:spPr>
           <a:xfrm>
-            <a:off x="594360" y="2980944"/>
-            <a:ext cx="11002975" cy="347472"/>
+            <a:off x="640080" y="2985516"/>
+            <a:ext cx="10911535" cy="731520"/>
           </a:xfrm>
           <a:prstGeom prst="rect">
             <a:avLst/>
@@ -5035,83 +4650,13 @@
           <a:p>
             <a:pPr algn="ctr"/>
             <a:r>
-              <a:rPr sz="2200" b="0" i="1">
-                <a:solidFill>
-                  <a:srgbClr val="8C8C8C"/>
-                </a:solidFill>
-                <a:latin typeface="Arial"/>
-              </a:rPr>
-              <a:t/>
-            </a:r>
-          </a:p>
-        </p:txBody>
-      </p:sp>
-      <p:sp>
-        <p:nvSpPr>
-          <p:cNvPr id="4" name="TextBox 3"/>
-          <p:cNvSpPr txBox="1"/>
-          <p:nvPr/>
-        </p:nvSpPr>
-        <p:spPr>
-          <a:xfrm>
-            <a:off x="594360" y="3529584"/>
-            <a:ext cx="11002975" cy="685800"/>
-          </a:xfrm>
-          <a:prstGeom prst="rect">
-            <a:avLst/>
-          </a:prstGeom>
-          <a:noFill/>
-        </p:spPr>
-        <p:txBody>
-          <a:bodyPr wrap="square">
-            <a:spAutoFit/>
-          </a:bodyPr>
-          <a:lstStyle/>
-          <a:p>
-            <a:pPr algn="ctr"/>
-            <a:r>
-              <a:rPr sz="3200" b="1" i="0">
+              <a:rPr sz="3400" b="1" i="0">
                 <a:solidFill>
                   <a:srgbClr val="FFFFFF"/>
                 </a:solidFill>
                 <a:latin typeface="Arial"/>
               </a:rPr>
               <a:t>Rei exaltado do céu, minha vitória alcançada</a:t>
-            </a:r>
-          </a:p>
-        </p:txBody>
-      </p:sp>
-      <p:sp>
-        <p:nvSpPr>
-          <p:cNvPr id="5" name="TextBox 4"/>
-          <p:cNvSpPr txBox="1"/>
-          <p:nvPr/>
-        </p:nvSpPr>
-        <p:spPr>
-          <a:xfrm>
-            <a:off x="594360" y="4251960"/>
-            <a:ext cx="11002975" cy="347472"/>
-          </a:xfrm>
-          <a:prstGeom prst="rect">
-            <a:avLst/>
-          </a:prstGeom>
-          <a:noFill/>
-        </p:spPr>
-        <p:txBody>
-          <a:bodyPr wrap="square">
-            <a:spAutoFit/>
-          </a:bodyPr>
-          <a:lstStyle/>
-          <a:p>
-            <a:pPr algn="ctr"/>
-            <a:r>
-              <a:rPr sz="2200" b="0" i="1">
-                <a:solidFill>
-                  <a:srgbClr val="8C8C8C"/>
-                </a:solidFill>
-                <a:latin typeface="Arial"/>
-              </a:rPr>
-              <a:t/>
             </a:r>
           </a:p>
         </p:txBody>

--- a/output_pptx/Be_Thou_My_Vision.pptx
+++ b/output_pptx/Be_Thou_My_Vision.pptx
@@ -3176,6 +3176,76 @@
           </a:p>
         </p:txBody>
       </p:sp>
+      <p:sp>
+        <p:nvSpPr>
+          <p:cNvPr id="4" name="TextBox 3"/>
+          <p:cNvSpPr txBox="1"/>
+          <p:nvPr/>
+        </p:nvSpPr>
+        <p:spPr>
+          <a:xfrm>
+            <a:off x="640080" y="4128516"/>
+            <a:ext cx="10911535" cy="310896"/>
+          </a:xfrm>
+          <a:prstGeom prst="rect">
+            <a:avLst/>
+          </a:prstGeom>
+          <a:noFill/>
+        </p:spPr>
+        <p:txBody>
+          <a:bodyPr wrap="square">
+            <a:spAutoFit/>
+          </a:bodyPr>
+          <a:lstStyle/>
+          <a:p>
+            <a:pPr algn="ctr"/>
+            <a:r>
+              <a:rPr sz="2000" b="0" i="0">
+                <a:solidFill>
+                  <a:srgbClr val="828282"/>
+                </a:solidFill>
+                <a:latin typeface="Arial"/>
+              </a:rPr>
+              <a:t>あなたが私のビジョン</a:t>
+            </a:r>
+          </a:p>
+        </p:txBody>
+      </p:sp>
+      <p:sp>
+        <p:nvSpPr>
+          <p:cNvPr id="5" name="TextBox 4"/>
+          <p:cNvSpPr txBox="1"/>
+          <p:nvPr/>
+        </p:nvSpPr>
+        <p:spPr>
+          <a:xfrm>
+            <a:off x="640080" y="4494276"/>
+            <a:ext cx="10911535" cy="310896"/>
+          </a:xfrm>
+          <a:prstGeom prst="rect">
+            <a:avLst/>
+          </a:prstGeom>
+          <a:noFill/>
+        </p:spPr>
+        <p:txBody>
+          <a:bodyPr wrap="square">
+            <a:spAutoFit/>
+          </a:bodyPr>
+          <a:lstStyle/>
+          <a:p>
+            <a:pPr algn="ctr"/>
+            <a:r>
+              <a:rPr sz="2000" b="0" i="0">
+                <a:solidFill>
+                  <a:srgbClr val="828282"/>
+                </a:solidFill>
+                <a:latin typeface="Arial"/>
+              </a:rPr>
+              <a:t>主よ、あなたが私の心のビジョンであってください</a:t>
+            </a:r>
+          </a:p>
+        </p:txBody>
+      </p:sp>
     </p:spTree>
   </p:cSld>
   <p:clrMapOvr>
@@ -3744,6 +3814,76 @@
           </a:p>
         </p:txBody>
       </p:sp>
+      <p:sp>
+        <p:nvSpPr>
+          <p:cNvPr id="4" name="TextBox 3"/>
+          <p:cNvSpPr txBox="1"/>
+          <p:nvPr/>
+        </p:nvSpPr>
+        <p:spPr>
+          <a:xfrm>
+            <a:off x="640080" y="4128516"/>
+            <a:ext cx="10911535" cy="310896"/>
+          </a:xfrm>
+          <a:prstGeom prst="rect">
+            <a:avLst/>
+          </a:prstGeom>
+          <a:noFill/>
+        </p:spPr>
+        <p:txBody>
+          <a:bodyPr wrap="square">
+            <a:spAutoFit/>
+          </a:bodyPr>
+          <a:lstStyle/>
+          <a:p>
+            <a:pPr algn="ctr"/>
+            <a:r>
+              <a:rPr sz="2000" b="0" i="0">
+                <a:solidFill>
+                  <a:srgbClr val="828282"/>
+                </a:solidFill>
+                <a:latin typeface="Arial"/>
+              </a:rPr>
+              <a:t>あなた以外に何もなく、すべてが私のものとなりますように</a:t>
+            </a:r>
+          </a:p>
+        </p:txBody>
+      </p:sp>
+      <p:sp>
+        <p:nvSpPr>
+          <p:cNvPr id="5" name="TextBox 4"/>
+          <p:cNvSpPr txBox="1"/>
+          <p:nvPr/>
+        </p:nvSpPr>
+        <p:spPr>
+          <a:xfrm>
+            <a:off x="640080" y="4494276"/>
+            <a:ext cx="10911535" cy="310896"/>
+          </a:xfrm>
+          <a:prstGeom prst="rect">
+            <a:avLst/>
+          </a:prstGeom>
+          <a:noFill/>
+        </p:spPr>
+        <p:txBody>
+          <a:bodyPr wrap="square">
+            <a:spAutoFit/>
+          </a:bodyPr>
+          <a:lstStyle/>
+          <a:p>
+            <a:pPr algn="ctr"/>
+            <a:r>
+              <a:rPr sz="2000" b="0" i="0">
+                <a:solidFill>
+                  <a:srgbClr val="828282"/>
+                </a:solidFill>
+                <a:latin typeface="Arial"/>
+              </a:rPr>
+              <a:t>あなたは昼も夜も私の最高の思い</a:t>
+            </a:r>
+          </a:p>
+        </p:txBody>
+      </p:sp>
     </p:spTree>
   </p:cSld>
   <p:clrMapOvr>
@@ -4312,6 +4452,76 @@
           </a:p>
         </p:txBody>
       </p:sp>
+      <p:sp>
+        <p:nvSpPr>
+          <p:cNvPr id="4" name="TextBox 3"/>
+          <p:cNvSpPr txBox="1"/>
+          <p:nvPr/>
+        </p:nvSpPr>
+        <p:spPr>
+          <a:xfrm>
+            <a:off x="640080" y="4128516"/>
+            <a:ext cx="10911535" cy="310896"/>
+          </a:xfrm>
+          <a:prstGeom prst="rect">
+            <a:avLst/>
+          </a:prstGeom>
+          <a:noFill/>
+        </p:spPr>
+        <p:txBody>
+          <a:bodyPr wrap="square">
+            <a:spAutoFit/>
+          </a:bodyPr>
+          <a:lstStyle/>
+          <a:p>
+            <a:pPr algn="ctr"/>
+            <a:r>
+              <a:rPr sz="2000" b="0" i="0">
+                <a:solidFill>
+                  <a:srgbClr val="828282"/>
+                </a:solidFill>
+                <a:latin typeface="Arial"/>
+              </a:rPr>
+              <a:t>目覚めているときも寝ているときも、あなたの臨在が私の光</a:t>
+            </a:r>
+          </a:p>
+        </p:txBody>
+      </p:sp>
+      <p:sp>
+        <p:nvSpPr>
+          <p:cNvPr id="5" name="TextBox 4"/>
+          <p:cNvSpPr txBox="1"/>
+          <p:nvPr/>
+        </p:nvSpPr>
+        <p:spPr>
+          <a:xfrm>
+            <a:off x="640080" y="4494276"/>
+            <a:ext cx="10911535" cy="310896"/>
+          </a:xfrm>
+          <a:prstGeom prst="rect">
+            <a:avLst/>
+          </a:prstGeom>
+          <a:noFill/>
+        </p:spPr>
+        <p:txBody>
+          <a:bodyPr wrap="square">
+            <a:spAutoFit/>
+          </a:bodyPr>
+          <a:lstStyle/>
+          <a:p>
+            <a:pPr algn="ctr"/>
+            <a:r>
+              <a:rPr sz="2000" b="0" i="0">
+                <a:solidFill>
+                  <a:srgbClr val="828282"/>
+                </a:solidFill>
+                <a:latin typeface="Arial"/>
+              </a:rPr>
+              <a:t>あなたが私の知恵となり、あなたが私のことばとなってください</a:t>
+            </a:r>
+          </a:p>
+        </p:txBody>
+      </p:sp>
     </p:spTree>
   </p:cSld>
   <p:clrMapOvr>
@@ -4408,6 +4618,76 @@
           </a:p>
         </p:txBody>
       </p:sp>
+      <p:sp>
+        <p:nvSpPr>
+          <p:cNvPr id="4" name="TextBox 3"/>
+          <p:cNvSpPr txBox="1"/>
+          <p:nvPr/>
+        </p:nvSpPr>
+        <p:spPr>
+          <a:xfrm>
+            <a:off x="640080" y="4128516"/>
+            <a:ext cx="10911535" cy="310896"/>
+          </a:xfrm>
+          <a:prstGeom prst="rect">
+            <a:avLst/>
+          </a:prstGeom>
+          <a:noFill/>
+        </p:spPr>
+        <p:txBody>
+          <a:bodyPr wrap="square">
+            <a:spAutoFit/>
+          </a:bodyPr>
+          <a:lstStyle/>
+          <a:p>
+            <a:pPr algn="ctr"/>
+            <a:r>
+              <a:rPr sz="2000" b="0" i="0">
+                <a:solidFill>
+                  <a:srgbClr val="828282"/>
+                </a:solidFill>
+                <a:latin typeface="Arial"/>
+              </a:rPr>
+              <a:t>常にあなたの中にあり、主よ、あなたが私とともに</a:t>
+            </a:r>
+          </a:p>
+        </p:txBody>
+      </p:sp>
+      <p:sp>
+        <p:nvSpPr>
+          <p:cNvPr id="5" name="TextBox 4"/>
+          <p:cNvSpPr txBox="1"/>
+          <p:nvPr/>
+        </p:nvSpPr>
+        <p:spPr>
+          <a:xfrm>
+            <a:off x="640080" y="4494276"/>
+            <a:ext cx="10911535" cy="310896"/>
+          </a:xfrm>
+          <a:prstGeom prst="rect">
+            <a:avLst/>
+          </a:prstGeom>
+          <a:noFill/>
+        </p:spPr>
+        <p:txBody>
+          <a:bodyPr wrap="square">
+            <a:spAutoFit/>
+          </a:bodyPr>
+          <a:lstStyle/>
+          <a:p>
+            <a:pPr algn="ctr"/>
+            <a:r>
+              <a:rPr sz="2000" b="0" i="0">
+                <a:solidFill>
+                  <a:srgbClr val="828282"/>
+                </a:solidFill>
+                <a:latin typeface="Arial"/>
+              </a:rPr>
+              <a:t>あなたは私の大いなる父、私はあなたの真実の子</a:t>
+            </a:r>
+          </a:p>
+        </p:txBody>
+      </p:sp>
     </p:spTree>
   </p:cSld>
   <p:clrMapOvr>
@@ -4469,6 +4749,41 @@
           </a:p>
         </p:txBody>
       </p:sp>
+      <p:sp>
+        <p:nvSpPr>
+          <p:cNvPr id="3" name="TextBox 2"/>
+          <p:cNvSpPr txBox="1"/>
+          <p:nvPr/>
+        </p:nvSpPr>
+        <p:spPr>
+          <a:xfrm>
+            <a:off x="640080" y="3845052"/>
+            <a:ext cx="10911535" cy="310896"/>
+          </a:xfrm>
+          <a:prstGeom prst="rect">
+            <a:avLst/>
+          </a:prstGeom>
+          <a:noFill/>
+        </p:spPr>
+        <p:txBody>
+          <a:bodyPr wrap="square">
+            <a:spAutoFit/>
+          </a:bodyPr>
+          <a:lstStyle/>
+          <a:p>
+            <a:pPr algn="ctr"/>
+            <a:r>
+              <a:rPr sz="2000" b="0" i="0">
+                <a:solidFill>
+                  <a:srgbClr val="828282"/>
+                </a:solidFill>
+                <a:latin typeface="Arial"/>
+              </a:rPr>
+              <a:t>あなたが私のうちに住み、私があなたと一つになる</a:t>
+            </a:r>
+          </a:p>
+        </p:txBody>
+      </p:sp>
     </p:spTree>
   </p:cSld>
   <p:clrMapOvr>
@@ -4565,6 +4880,76 @@
           </a:p>
         </p:txBody>
       </p:sp>
+      <p:sp>
+        <p:nvSpPr>
+          <p:cNvPr id="4" name="TextBox 3"/>
+          <p:cNvSpPr txBox="1"/>
+          <p:nvPr/>
+        </p:nvSpPr>
+        <p:spPr>
+          <a:xfrm>
+            <a:off x="640080" y="4128516"/>
+            <a:ext cx="10911535" cy="310896"/>
+          </a:xfrm>
+          <a:prstGeom prst="rect">
+            <a:avLst/>
+          </a:prstGeom>
+          <a:noFill/>
+        </p:spPr>
+        <p:txBody>
+          <a:bodyPr wrap="square">
+            <a:spAutoFit/>
+          </a:bodyPr>
+          <a:lstStyle/>
+          <a:p>
+            <a:pPr algn="ctr"/>
+            <a:r>
+              <a:rPr sz="2000" b="0" i="0">
+                <a:solidFill>
+                  <a:srgbClr val="828282"/>
+                </a:solidFill>
+                <a:latin typeface="Arial"/>
+              </a:rPr>
+              <a:t>あなたは今も永遠も私の受け継ぐもの</a:t>
+            </a:r>
+          </a:p>
+        </p:txBody>
+      </p:sp>
+      <p:sp>
+        <p:nvSpPr>
+          <p:cNvPr id="5" name="TextBox 4"/>
+          <p:cNvSpPr txBox="1"/>
+          <p:nvPr/>
+        </p:nvSpPr>
+        <p:spPr>
+          <a:xfrm>
+            <a:off x="640080" y="4494276"/>
+            <a:ext cx="10911535" cy="310896"/>
+          </a:xfrm>
+          <a:prstGeom prst="rect">
+            <a:avLst/>
+          </a:prstGeom>
+          <a:noFill/>
+        </p:spPr>
+        <p:txBody>
+          <a:bodyPr wrap="square">
+            <a:spAutoFit/>
+          </a:bodyPr>
+          <a:lstStyle/>
+          <a:p>
+            <a:pPr algn="ctr"/>
+            <a:r>
+              <a:rPr sz="2000" b="0" i="0">
+                <a:solidFill>
+                  <a:srgbClr val="828282"/>
+                </a:solidFill>
+                <a:latin typeface="Arial"/>
+              </a:rPr>
+              <a:t>あなただけが、ただあなただけが私の心で最初</a:t>
+            </a:r>
+          </a:p>
+        </p:txBody>
+      </p:sp>
     </p:spTree>
   </p:cSld>
   <p:clrMapOvr>
@@ -4657,6 +5042,76 @@
                 <a:latin typeface="Arial"/>
               </a:rPr>
               <a:t>Rei exaltado do céu, minha vitória alcançada</a:t>
+            </a:r>
+          </a:p>
+        </p:txBody>
+      </p:sp>
+      <p:sp>
+        <p:nvSpPr>
+          <p:cNvPr id="4" name="TextBox 3"/>
+          <p:cNvSpPr txBox="1"/>
+          <p:nvPr/>
+        </p:nvSpPr>
+        <p:spPr>
+          <a:xfrm>
+            <a:off x="640080" y="4128516"/>
+            <a:ext cx="10911535" cy="310896"/>
+          </a:xfrm>
+          <a:prstGeom prst="rect">
+            <a:avLst/>
+          </a:prstGeom>
+          <a:noFill/>
+        </p:spPr>
+        <p:txBody>
+          <a:bodyPr wrap="square">
+            <a:spAutoFit/>
+          </a:bodyPr>
+          <a:lstStyle/>
+          <a:p>
+            <a:pPr algn="ctr"/>
+            <a:r>
+              <a:rPr sz="2000" b="0" i="0">
+                <a:solidFill>
+                  <a:srgbClr val="828282"/>
+                </a:solidFill>
+                <a:latin typeface="Arial"/>
+              </a:rPr>
+              <a:t>天の高き王よ、あなたが私の宝</a:t>
+            </a:r>
+          </a:p>
+        </p:txBody>
+      </p:sp>
+      <p:sp>
+        <p:nvSpPr>
+          <p:cNvPr id="5" name="TextBox 4"/>
+          <p:cNvSpPr txBox="1"/>
+          <p:nvPr/>
+        </p:nvSpPr>
+        <p:spPr>
+          <a:xfrm>
+            <a:off x="640080" y="4494276"/>
+            <a:ext cx="10911535" cy="310896"/>
+          </a:xfrm>
+          <a:prstGeom prst="rect">
+            <a:avLst/>
+          </a:prstGeom>
+          <a:noFill/>
+        </p:spPr>
+        <p:txBody>
+          <a:bodyPr wrap="square">
+            <a:spAutoFit/>
+          </a:bodyPr>
+          <a:lstStyle/>
+          <a:p>
+            <a:pPr algn="ctr"/>
+            <a:r>
+              <a:rPr sz="2000" b="0" i="0">
+                <a:solidFill>
+                  <a:srgbClr val="828282"/>
+                </a:solidFill>
+                <a:latin typeface="Arial"/>
+              </a:rPr>
+              <a:t>天の高き王よ、あなたが私の勝利</a:t>
             </a:r>
           </a:p>
         </p:txBody>
